--- a/dist/초5/수학/곱셈과어림/초5_수학_곱셈과어림_03_분수와자연수의곱셈_학생용.pptx
+++ b/dist/초5/수학/곱셈과어림/초5_수학_곱셈과어림_03_분수와자연수의곱셈_학생용.pptx
@@ -120,13 +120,13 @@
   <p:extLst>
     <p:ext uri="{521415D9-36F7-43E2-AB2F-B90AF26B5E84}">
       <p14:sectionLst xmlns:p14="http://schemas.microsoft.com/office/powerpoint/2010/main">
-        <p14:section name="도입" id="{1f66cc45-e451-8064-9aac-4dd692bea2f7}">
+        <p14:section name="도입" id="{7b23b73c-0308-e88c-1c71-6a5116adf9ea}">
           <p14:sldIdLst>
             <p14:sldId id="256"/>
             <p14:sldId id="257"/>
           </p14:sldIdLst>
         </p14:section>
-        <p14:section name="개념" id="{1aa1ff06-cab8-a12b-926e-224398b482a7}">
+        <p14:section name="개념" id="{00b62a03-d8db-d767-588c-6cb9234bf34d}">
           <p14:sldIdLst>
             <p14:sldId id="258"/>
             <p14:sldId id="259"/>
@@ -135,31 +135,31 @@
             <p14:sldId id="263"/>
           </p14:sldIdLst>
         </p14:section>
-        <p14:section name="연습" id="{afa9c18c-9002-e369-b786-484382b2d1e8}">
+        <p14:section name="연습" id="{c33e3505-b409-975f-83c6-951dafc05a53}">
           <p14:sldIdLst>
             <p14:sldId id="261"/>
             <p14:sldId id="264"/>
             <p14:sldId id="265"/>
           </p14:sldIdLst>
         </p14:section>
-        <p14:section name="개념" id="{6671c583-4732-73e7-d5e9-1f8b958c3b8c}">
+        <p14:section name="개념" id="{6f3b3a9a-7253-2437-32a2-df015075b5c7}">
           <p14:sldIdLst/>
         </p14:section>
-        <p14:section name="연습" id="{ea61214a-d579-3e5b-2d04-d9879e1c86f7}">
+        <p14:section name="연습" id="{fc11e63d-45c3-8000-5171-0766c49d8f72}">
           <p14:sldIdLst/>
         </p14:section>
-        <p14:section name="확인" id="{21128864-1c50-eeb2-b63e-faf677fe3ffe}">
+        <p14:section name="확인" id="{0c8188d0-a8cc-6174-ca10-502ed6a610a5}">
           <p14:sldIdLst>
             <p14:sldId id="266"/>
             <p14:sldId id="267"/>
           </p14:sldIdLst>
         </p14:section>
-        <p14:section name="정리" id="{16800dc2-6a3b-2fb3-7054-754d25e081f0}">
+        <p14:section name="정리" id="{eb635bc9-b567-8e50-8bf3-13c088d6a6f0}">
           <p14:sldIdLst>
             <p14:sldId id="268"/>
           </p14:sldIdLst>
         </p14:section>
-        <p14:section name="보충" id="{69106550-b5c3-a768-2b8e-948c6426d62c}">
+        <p14:section name="보충" id="{72a53401-2114-4054-2ab9-ebd4a8409ec9}">
           <p14:sldIdLst>
             <p14:sldId id="269"/>
           </p14:sldIdLst>
